--- a/docs/module1-foundations_of_python_coding/module1s4/midmodule_recap.pptx
+++ b/docs/module1-foundations_of_python_coding/module1s4/midmodule_recap.pptx
@@ -6583,7 +6583,7 @@
               <a:rPr lang="en-GB" dirty="0">
                 <a:sym typeface="Wingdings" panose="05000000000000000000" pitchFamily="2" charset="2"/>
               </a:rPr>
-              <a:t>It can be done individually, in groups…</a:t>
+              <a:t>It can be done individually, in groups…, whatever you prefer</a:t>
             </a:r>
           </a:p>
           <a:p>
@@ -6595,7 +6595,7 @@
               <a:rPr lang="en-GB" dirty="0">
                 <a:sym typeface="Wingdings" panose="05000000000000000000" pitchFamily="2" charset="2"/>
               </a:rPr>
-              <a:t>Ask for feedback in Teams if needed</a:t>
+              <a:t>Ask for feedback in Teams if needed  we can also suggest projects</a:t>
             </a:r>
           </a:p>
           <a:p>
@@ -6619,7 +6619,7 @@
               <a:rPr lang="en-GB" b="1" dirty="0">
                 <a:sym typeface="Wingdings" panose="05000000000000000000" pitchFamily="2" charset="2"/>
               </a:rPr>
-              <a:t>Next session: we will talk in detail about the format</a:t>
+              <a:t>Next session: we will talk in detail about the format &amp; answer any doubt</a:t>
             </a:r>
           </a:p>
           <a:p>
